--- a/cloudflare-deploy/public/library/admin/admin-kr.pptx
+++ b/cloudflare-deploy/public/library/admin/admin-kr.pptx
@@ -4062,7 +4062,7 @@
                 </a:solidFill>
                 <a:latin typeface="Malgun Gothic"/>
               </a:rPr>
-              <a:t>대상 · 학원 원장·본사·운영 관리자   |   test.mangoi.co.kr</a:t>
+              <a:t>대상 · 학원 원장·본사·운영 관리자   |   www.mangoi.co.kr</a:t>
             </a:r>
           </a:p>
         </p:txBody>
@@ -28050,7 +28050,7 @@
                 </a:solidFill>
                 <a:latin typeface="Malgun Gothic"/>
               </a:rPr>
-              <a:t>🌐 test.mangoi.co.kr    📞 1588-0000    ✉ support@mangoi.co.kr</a:t>
+              <a:t>🌐 www.mangoi.co.kr    📞 1644-0561    ✉ support@mangoi.co.kr</a:t>
             </a:r>
           </a:p>
         </p:txBody>

--- a/cloudflare-deploy/public/library/admin/admin-kr.pptx
+++ b/cloudflare-deploy/public/library/admin/admin-kr.pptx
@@ -6,6 +6,7 @@
   </p:sldMasterIdLst>
   <p:sldIdLst>
     <p:sldId id="256" r:id="rId7"/>
+    <p:sldId id="289" r:id="rId40"/>
     <p:sldId id="257" r:id="rId8"/>
     <p:sldId id="258" r:id="rId9"/>
     <p:sldId id="259" r:id="rId10"/>
@@ -22540,7 +22541,7 @@
         </p:nvSpPr>
         <p:spPr>
           <a:xfrm>
-            <a:off x="365760" y="868680"/>
+            <a:off x="987552" y="868680"/>
             <a:ext cx="9144000" cy="457200"/>
           </a:xfrm>
           <a:prstGeom prst="rect">
@@ -23257,6 +23258,89 @@
           </a:graphicData>
         </a:graphic>
       </p:graphicFrame>
+      <p:sp>
+        <p:nvSpPr>
+          <p:cNvPr id="6" name="Rounded Rectangle 5"/>
+          <p:cNvSpPr/>
+          <p:nvPr/>
+        </p:nvSpPr>
+        <p:spPr>
+          <a:xfrm>
+            <a:off x="365760" y="841247"/>
+            <a:ext cx="475488" cy="475488"/>
+          </a:xfrm>
+          <a:prstGeom prst="roundRect">
+            <a:avLst/>
+          </a:prstGeom>
+          <a:solidFill>
+            <a:srgbClr val="4F46E5"/>
+          </a:solidFill>
+          <a:ln>
+            <a:noFill/>
+          </a:ln>
+          <a:effectLst/>
+        </p:spPr>
+        <p:style>
+          <a:lnRef idx="1">
+            <a:schemeClr val="accent1"/>
+          </a:lnRef>
+          <a:fillRef idx="3">
+            <a:schemeClr val="accent1"/>
+          </a:fillRef>
+          <a:effectRef idx="2">
+            <a:schemeClr val="accent1"/>
+          </a:effectRef>
+          <a:fontRef idx="minor">
+            <a:schemeClr val="lt1"/>
+          </a:fontRef>
+        </p:style>
+        <p:txBody>
+          <a:bodyPr rtlCol="0" anchor="ctr"/>
+          <a:lstStyle/>
+          <a:p>
+            <a:pPr algn="ctr"/>
+          </a:p>
+        </p:txBody>
+      </p:sp>
+      <p:sp>
+        <p:nvSpPr>
+          <p:cNvPr id="7" name="TextBox 6"/>
+          <p:cNvSpPr txBox="1"/>
+          <p:nvPr/>
+        </p:nvSpPr>
+        <p:spPr>
+          <a:xfrm>
+            <a:off x="365760" y="841247"/>
+            <a:ext cx="475488" cy="475488"/>
+          </a:xfrm>
+          <a:prstGeom prst="rect">
+            <a:avLst/>
+          </a:prstGeom>
+          <a:noFill/>
+        </p:spPr>
+        <p:txBody>
+          <a:bodyPr wrap="square" anchor="ctr">
+            <a:spAutoFit/>
+          </a:bodyPr>
+          <a:lstStyle/>
+          <a:p>
+            <a:pPr algn="ctr">
+              <a:lnSpc>
+                <a:spcPct val="100000"/>
+              </a:lnSpc>
+            </a:pPr>
+            <a:r>
+              <a:rPr sz="1500" b="1">
+                <a:solidFill>
+                  <a:srgbClr val="FFFFFF"/>
+                </a:solidFill>
+                <a:latin typeface="Malgun Gothic"/>
+              </a:rPr>
+              <a:t>26</a:t>
+            </a:r>
+          </a:p>
+        </p:txBody>
+      </p:sp>
     </p:spTree>
   </p:cSld>
   <p:clrMapOvr>
@@ -23457,7 +23541,7 @@
         </p:nvSpPr>
         <p:spPr>
           <a:xfrm>
-            <a:off x="365760" y="868680"/>
+            <a:off x="987552" y="868680"/>
             <a:ext cx="9144000" cy="457200"/>
           </a:xfrm>
           <a:prstGeom prst="rect">
@@ -23602,6 +23686,89 @@
           </a:graphicData>
         </a:graphic>
       </p:graphicFrame>
+      <p:sp>
+        <p:nvSpPr>
+          <p:cNvPr id="6" name="Rounded Rectangle 5"/>
+          <p:cNvSpPr/>
+          <p:nvPr/>
+        </p:nvSpPr>
+        <p:spPr>
+          <a:xfrm>
+            <a:off x="365760" y="841247"/>
+            <a:ext cx="475488" cy="475488"/>
+          </a:xfrm>
+          <a:prstGeom prst="roundRect">
+            <a:avLst/>
+          </a:prstGeom>
+          <a:solidFill>
+            <a:srgbClr val="4F46E5"/>
+          </a:solidFill>
+          <a:ln>
+            <a:noFill/>
+          </a:ln>
+          <a:effectLst/>
+        </p:spPr>
+        <p:style>
+          <a:lnRef idx="1">
+            <a:schemeClr val="accent1"/>
+          </a:lnRef>
+          <a:fillRef idx="3">
+            <a:schemeClr val="accent1"/>
+          </a:fillRef>
+          <a:effectRef idx="2">
+            <a:schemeClr val="accent1"/>
+          </a:effectRef>
+          <a:fontRef idx="minor">
+            <a:schemeClr val="lt1"/>
+          </a:fontRef>
+        </p:style>
+        <p:txBody>
+          <a:bodyPr rtlCol="0" anchor="ctr"/>
+          <a:lstStyle/>
+          <a:p>
+            <a:pPr algn="ctr"/>
+          </a:p>
+        </p:txBody>
+      </p:sp>
+      <p:sp>
+        <p:nvSpPr>
+          <p:cNvPr id="7" name="TextBox 6"/>
+          <p:cNvSpPr txBox="1"/>
+          <p:nvPr/>
+        </p:nvSpPr>
+        <p:spPr>
+          <a:xfrm>
+            <a:off x="365760" y="841247"/>
+            <a:ext cx="475488" cy="475488"/>
+          </a:xfrm>
+          <a:prstGeom prst="rect">
+            <a:avLst/>
+          </a:prstGeom>
+          <a:noFill/>
+        </p:spPr>
+        <p:txBody>
+          <a:bodyPr wrap="square" anchor="ctr">
+            <a:spAutoFit/>
+          </a:bodyPr>
+          <a:lstStyle/>
+          <a:p>
+            <a:pPr algn="ctr">
+              <a:lnSpc>
+                <a:spcPct val="100000"/>
+              </a:lnSpc>
+            </a:pPr>
+            <a:r>
+              <a:rPr sz="1500" b="1">
+                <a:solidFill>
+                  <a:srgbClr val="FFFFFF"/>
+                </a:solidFill>
+                <a:latin typeface="Malgun Gothic"/>
+              </a:rPr>
+              <a:t>27</a:t>
+            </a:r>
+          </a:p>
+        </p:txBody>
+      </p:sp>
     </p:spTree>
   </p:cSld>
   <p:clrMapOvr>
@@ -24731,7 +24898,7 @@
         </p:nvSpPr>
         <p:spPr>
           <a:xfrm>
-            <a:off x="365760" y="868680"/>
+            <a:off x="987552" y="868680"/>
             <a:ext cx="9144000" cy="457200"/>
           </a:xfrm>
           <a:prstGeom prst="rect">
@@ -25502,6 +25669,89 @@
                 <a:latin typeface="Malgun Gothic"/>
               </a:rPr>
               <a:t>A. 리텐션 센터의 이탈위험·전염 관계망으로 미리 찾아 알림톡·상담으로 개입하세요.</a:t>
+            </a:r>
+          </a:p>
+        </p:txBody>
+      </p:sp>
+      <p:sp>
+        <p:nvSpPr>
+          <p:cNvPr id="6" name="Rounded Rectangle 5"/>
+          <p:cNvSpPr/>
+          <p:nvPr/>
+        </p:nvSpPr>
+        <p:spPr>
+          <a:xfrm>
+            <a:off x="365760" y="841247"/>
+            <a:ext cx="475488" cy="475488"/>
+          </a:xfrm>
+          <a:prstGeom prst="roundRect">
+            <a:avLst/>
+          </a:prstGeom>
+          <a:solidFill>
+            <a:srgbClr val="4F46E5"/>
+          </a:solidFill>
+          <a:ln>
+            <a:noFill/>
+          </a:ln>
+          <a:effectLst/>
+        </p:spPr>
+        <p:style>
+          <a:lnRef idx="1">
+            <a:schemeClr val="accent1"/>
+          </a:lnRef>
+          <a:fillRef idx="3">
+            <a:schemeClr val="accent1"/>
+          </a:fillRef>
+          <a:effectRef idx="2">
+            <a:schemeClr val="accent1"/>
+          </a:effectRef>
+          <a:fontRef idx="minor">
+            <a:schemeClr val="lt1"/>
+          </a:fontRef>
+        </p:style>
+        <p:txBody>
+          <a:bodyPr rtlCol="0" anchor="ctr"/>
+          <a:lstStyle/>
+          <a:p>
+            <a:pPr algn="ctr"/>
+          </a:p>
+        </p:txBody>
+      </p:sp>
+      <p:sp>
+        <p:nvSpPr>
+          <p:cNvPr id="7" name="TextBox 6"/>
+          <p:cNvSpPr txBox="1"/>
+          <p:nvPr/>
+        </p:nvSpPr>
+        <p:spPr>
+          <a:xfrm>
+            <a:off x="365760" y="841247"/>
+            <a:ext cx="475488" cy="475488"/>
+          </a:xfrm>
+          <a:prstGeom prst="rect">
+            <a:avLst/>
+          </a:prstGeom>
+          <a:noFill/>
+        </p:spPr>
+        <p:txBody>
+          <a:bodyPr wrap="square" anchor="ctr">
+            <a:spAutoFit/>
+          </a:bodyPr>
+          <a:lstStyle/>
+          <a:p>
+            <a:pPr algn="ctr">
+              <a:lnSpc>
+                <a:spcPct val="100000"/>
+              </a:lnSpc>
+            </a:pPr>
+            <a:r>
+              <a:rPr sz="1500" b="1">
+                <a:solidFill>
+                  <a:srgbClr val="FFFFFF"/>
+                </a:solidFill>
+                <a:latin typeface="Malgun Gothic"/>
+              </a:rPr>
+              <a:t>28</a:t>
             </a:r>
           </a:p>
         </p:txBody>
@@ -25706,7 +25956,7 @@
         </p:nvSpPr>
         <p:spPr>
           <a:xfrm>
-            <a:off x="365760" y="868680"/>
+            <a:off x="987552" y="868680"/>
             <a:ext cx="9144000" cy="457200"/>
           </a:xfrm>
           <a:prstGeom prst="rect">
@@ -26356,6 +26606,89 @@
           </a:prstGeom>
         </p:spPr>
       </p:pic>
+      <p:sp>
+        <p:nvSpPr>
+          <p:cNvPr id="6" name="Rounded Rectangle 5"/>
+          <p:cNvSpPr/>
+          <p:nvPr/>
+        </p:nvSpPr>
+        <p:spPr>
+          <a:xfrm>
+            <a:off x="365760" y="841247"/>
+            <a:ext cx="475488" cy="475488"/>
+          </a:xfrm>
+          <a:prstGeom prst="roundRect">
+            <a:avLst/>
+          </a:prstGeom>
+          <a:solidFill>
+            <a:srgbClr val="4F46E5"/>
+          </a:solidFill>
+          <a:ln>
+            <a:noFill/>
+          </a:ln>
+          <a:effectLst/>
+        </p:spPr>
+        <p:style>
+          <a:lnRef idx="1">
+            <a:schemeClr val="accent1"/>
+          </a:lnRef>
+          <a:fillRef idx="3">
+            <a:schemeClr val="accent1"/>
+          </a:fillRef>
+          <a:effectRef idx="2">
+            <a:schemeClr val="accent1"/>
+          </a:effectRef>
+          <a:fontRef idx="minor">
+            <a:schemeClr val="lt1"/>
+          </a:fontRef>
+        </p:style>
+        <p:txBody>
+          <a:bodyPr rtlCol="0" anchor="ctr"/>
+          <a:lstStyle/>
+          <a:p>
+            <a:pPr algn="ctr"/>
+          </a:p>
+        </p:txBody>
+      </p:sp>
+      <p:sp>
+        <p:nvSpPr>
+          <p:cNvPr id="7" name="TextBox 6"/>
+          <p:cNvSpPr txBox="1"/>
+          <p:nvPr/>
+        </p:nvSpPr>
+        <p:spPr>
+          <a:xfrm>
+            <a:off x="365760" y="841247"/>
+            <a:ext cx="475488" cy="475488"/>
+          </a:xfrm>
+          <a:prstGeom prst="rect">
+            <a:avLst/>
+          </a:prstGeom>
+          <a:noFill/>
+        </p:spPr>
+        <p:txBody>
+          <a:bodyPr wrap="square" anchor="ctr">
+            <a:spAutoFit/>
+          </a:bodyPr>
+          <a:lstStyle/>
+          <a:p>
+            <a:pPr algn="ctr">
+              <a:lnSpc>
+                <a:spcPct val="100000"/>
+              </a:lnSpc>
+            </a:pPr>
+            <a:r>
+              <a:rPr sz="1500" b="1">
+                <a:solidFill>
+                  <a:srgbClr val="FFFFFF"/>
+                </a:solidFill>
+                <a:latin typeface="Malgun Gothic"/>
+              </a:rPr>
+              <a:t>29</a:t>
+            </a:r>
+          </a:p>
+        </p:txBody>
+      </p:sp>
     </p:spTree>
   </p:cSld>
   <p:clrMapOvr>
@@ -26556,7 +26889,7 @@
         </p:nvSpPr>
         <p:spPr>
           <a:xfrm>
-            <a:off x="365760" y="822960"/>
+            <a:off x="987552" y="822960"/>
             <a:ext cx="11430000" cy="457200"/>
           </a:xfrm>
           <a:prstGeom prst="rect">
@@ -27776,6 +28109,89 @@
                 <a:latin typeface="Malgun Gothic"/>
               </a:rPr>
               <a:t>🍊 좋은 운영은 화려한 기능이 아니라 ‘매일의 작은 확인’에서 나옵니다. 지표를 챙기고, 이탈을 미리 막고, 규정을 명확히 안내하세요. AI 운영비서와 리텐션 센터가 그 일을 함께 도와드립니다. 궁금한 점은 언제든 고객센터로 — 안정적으로 성장하는 학원을 응원합니다! 🍊</a:t>
+            </a:r>
+          </a:p>
+        </p:txBody>
+      </p:sp>
+      <p:sp>
+        <p:nvSpPr>
+          <p:cNvPr id="6" name="Rounded Rectangle 5"/>
+          <p:cNvSpPr/>
+          <p:nvPr/>
+        </p:nvSpPr>
+        <p:spPr>
+          <a:xfrm>
+            <a:off x="365760" y="795528"/>
+            <a:ext cx="475488" cy="475488"/>
+          </a:xfrm>
+          <a:prstGeom prst="roundRect">
+            <a:avLst/>
+          </a:prstGeom>
+          <a:solidFill>
+            <a:srgbClr val="4F46E5"/>
+          </a:solidFill>
+          <a:ln>
+            <a:noFill/>
+          </a:ln>
+          <a:effectLst/>
+        </p:spPr>
+        <p:style>
+          <a:lnRef idx="1">
+            <a:schemeClr val="accent1"/>
+          </a:lnRef>
+          <a:fillRef idx="3">
+            <a:schemeClr val="accent1"/>
+          </a:fillRef>
+          <a:effectRef idx="2">
+            <a:schemeClr val="accent1"/>
+          </a:effectRef>
+          <a:fontRef idx="minor">
+            <a:schemeClr val="lt1"/>
+          </a:fontRef>
+        </p:style>
+        <p:txBody>
+          <a:bodyPr rtlCol="0" anchor="ctr"/>
+          <a:lstStyle/>
+          <a:p>
+            <a:pPr algn="ctr"/>
+          </a:p>
+        </p:txBody>
+      </p:sp>
+      <p:sp>
+        <p:nvSpPr>
+          <p:cNvPr id="7" name="TextBox 6"/>
+          <p:cNvSpPr txBox="1"/>
+          <p:nvPr/>
+        </p:nvSpPr>
+        <p:spPr>
+          <a:xfrm>
+            <a:off x="365760" y="795528"/>
+            <a:ext cx="475488" cy="475488"/>
+          </a:xfrm>
+          <a:prstGeom prst="rect">
+            <a:avLst/>
+          </a:prstGeom>
+          <a:noFill/>
+        </p:spPr>
+        <p:txBody>
+          <a:bodyPr wrap="square" anchor="ctr">
+            <a:spAutoFit/>
+          </a:bodyPr>
+          <a:lstStyle/>
+          <a:p>
+            <a:pPr algn="ctr">
+              <a:lnSpc>
+                <a:spcPct val="100000"/>
+              </a:lnSpc>
+            </a:pPr>
+            <a:r>
+              <a:rPr sz="1500" b="1">
+                <a:solidFill>
+                  <a:srgbClr val="FFFFFF"/>
+                </a:solidFill>
+                <a:latin typeface="Malgun Gothic"/>
+              </a:rPr>
+              <a:t>30</a:t>
             </a:r>
           </a:p>
         </p:txBody>
@@ -28051,6 +28467,1324 @@
                 <a:latin typeface="Malgun Gothic"/>
               </a:rPr>
               <a:t>🌐 www.mangoi.co.kr    📞 1644-0561    ✉ support@mangoi.co.kr</a:t>
+            </a:r>
+          </a:p>
+        </p:txBody>
+      </p:sp>
+    </p:spTree>
+  </p:cSld>
+  <p:clrMapOvr>
+    <a:masterClrMapping/>
+  </p:clrMapOvr>
+</p:sld>
+</file>
+
+<file path=ppt/slides/slide34.xml><?xml version="1.0" encoding="utf-8"?>
+<p:sld xmlns:a="http://schemas.openxmlformats.org/drawingml/2006/main" xmlns:p="http://schemas.openxmlformats.org/presentationml/2006/main" xmlns:r="http://schemas.openxmlformats.org/officeDocument/2006/relationships">
+  <p:cSld>
+    <p:spTree>
+      <p:nvGrpSpPr>
+        <p:cNvPr id="1" name=""/>
+        <p:cNvGrpSpPr/>
+        <p:nvPr/>
+      </p:nvGrpSpPr>
+      <p:grpSpPr/>
+      <p:sp>
+        <p:nvSpPr>
+          <p:cNvPr id="2" name="Rectangle 1"/>
+          <p:cNvSpPr/>
+          <p:nvPr/>
+        </p:nvSpPr>
+        <p:spPr>
+          <a:xfrm>
+            <a:off x="0" y="0"/>
+            <a:ext cx="12191695" cy="566928"/>
+          </a:xfrm>
+          <a:prstGeom prst="rect">
+            <a:avLst/>
+          </a:prstGeom>
+          <a:solidFill>
+            <a:srgbClr val="4F46E5"/>
+          </a:solidFill>
+          <a:ln>
+            <a:noFill/>
+          </a:ln>
+          <a:effectLst/>
+        </p:spPr>
+        <p:style>
+          <a:lnRef idx="1">
+            <a:schemeClr val="accent1"/>
+          </a:lnRef>
+          <a:fillRef idx="3">
+            <a:schemeClr val="accent1"/>
+          </a:fillRef>
+          <a:effectRef idx="2">
+            <a:schemeClr val="accent1"/>
+          </a:effectRef>
+          <a:fontRef idx="minor">
+            <a:schemeClr val="lt1"/>
+          </a:fontRef>
+        </p:style>
+        <p:txBody>
+          <a:bodyPr rtlCol="0" anchor="ctr"/>
+          <a:lstStyle/>
+          <a:p>
+            <a:pPr algn="ctr"/>
+          </a:p>
+        </p:txBody>
+      </p:sp>
+      <p:sp>
+        <p:nvSpPr>
+          <p:cNvPr id="3" name="Rectangle 2"/>
+          <p:cNvSpPr/>
+          <p:nvPr/>
+        </p:nvSpPr>
+        <p:spPr>
+          <a:xfrm>
+            <a:off x="0" y="566928"/>
+            <a:ext cx="12191695" cy="54864"/>
+          </a:xfrm>
+          <a:prstGeom prst="rect">
+            <a:avLst/>
+          </a:prstGeom>
+          <a:solidFill>
+            <a:srgbClr val="FF9F1C"/>
+          </a:solidFill>
+          <a:ln>
+            <a:noFill/>
+          </a:ln>
+          <a:effectLst/>
+        </p:spPr>
+        <p:style>
+          <a:lnRef idx="1">
+            <a:schemeClr val="accent1"/>
+          </a:lnRef>
+          <a:fillRef idx="3">
+            <a:schemeClr val="accent1"/>
+          </a:fillRef>
+          <a:effectRef idx="2">
+            <a:schemeClr val="accent1"/>
+          </a:effectRef>
+          <a:fontRef idx="minor">
+            <a:schemeClr val="lt1"/>
+          </a:fontRef>
+        </p:style>
+        <p:txBody>
+          <a:bodyPr rtlCol="0" anchor="ctr"/>
+          <a:lstStyle/>
+          <a:p>
+            <a:pPr algn="ctr"/>
+          </a:p>
+        </p:txBody>
+      </p:sp>
+      <p:sp>
+        <p:nvSpPr>
+          <p:cNvPr id="4" name="TextBox 3"/>
+          <p:cNvSpPr txBox="1"/>
+          <p:nvPr/>
+        </p:nvSpPr>
+        <p:spPr>
+          <a:xfrm>
+            <a:off x="365760" y="27432"/>
+            <a:ext cx="7315200" cy="502920"/>
+          </a:xfrm>
+          <a:prstGeom prst="rect">
+            <a:avLst/>
+          </a:prstGeom>
+          <a:noFill/>
+        </p:spPr>
+        <p:txBody>
+          <a:bodyPr wrap="square" anchor="ctr">
+            <a:spAutoFit/>
+          </a:bodyPr>
+          <a:lstStyle/>
+          <a:p>
+            <a:pPr algn="l">
+              <a:lnSpc>
+                <a:spcPct val="100000"/>
+              </a:lnSpc>
+            </a:pPr>
+            <a:r>
+              <a:rPr sz="1500" b="1">
+                <a:solidFill>
+                  <a:srgbClr val="FFFFFF"/>
+                </a:solidFill>
+                <a:latin typeface="Malgun Gothic"/>
+              </a:rPr>
+              <a:t>🏫 망고아이 관리자용 사용설명서</a:t>
+            </a:r>
+          </a:p>
+        </p:txBody>
+      </p:sp>
+      <p:sp>
+        <p:nvSpPr>
+          <p:cNvPr id="5" name="TextBox 4"/>
+          <p:cNvSpPr txBox="1"/>
+          <p:nvPr/>
+        </p:nvSpPr>
+        <p:spPr>
+          <a:xfrm>
+            <a:off x="8168335" y="27432"/>
+            <a:ext cx="3657600" cy="502920"/>
+          </a:xfrm>
+          <a:prstGeom prst="rect">
+            <a:avLst/>
+          </a:prstGeom>
+          <a:noFill/>
+        </p:spPr>
+        <p:txBody>
+          <a:bodyPr wrap="square" anchor="ctr">
+            <a:spAutoFit/>
+          </a:bodyPr>
+          <a:lstStyle/>
+          <a:p>
+            <a:pPr algn="r">
+              <a:lnSpc>
+                <a:spcPct val="100000"/>
+              </a:lnSpc>
+            </a:pPr>
+            <a:r>
+              <a:rPr sz="1300" b="1">
+                <a:solidFill>
+                  <a:srgbClr val="F1F5F9"/>
+                </a:solidFill>
+                <a:latin typeface="Malgun Gothic"/>
+              </a:rPr>
+              <a:t>차례</a:t>
+            </a:r>
+          </a:p>
+        </p:txBody>
+      </p:sp>
+      <p:sp>
+        <p:nvSpPr>
+          <p:cNvPr id="6" name="TextBox 5"/>
+          <p:cNvSpPr txBox="1"/>
+          <p:nvPr/>
+        </p:nvSpPr>
+        <p:spPr>
+          <a:xfrm>
+            <a:off x="365760" y="749808"/>
+            <a:ext cx="7315200" cy="502920"/>
+          </a:xfrm>
+          <a:prstGeom prst="rect">
+            <a:avLst/>
+          </a:prstGeom>
+          <a:noFill/>
+        </p:spPr>
+        <p:txBody>
+          <a:bodyPr wrap="none">
+            <a:spAutoFit/>
+          </a:bodyPr>
+          <a:lstStyle/>
+          <a:p>
+            <a:r>
+              <a:rPr sz="2200" b="1">
+                <a:solidFill>
+                  <a:srgbClr val="1E2340"/>
+                </a:solidFill>
+                <a:latin typeface="Malgun Gothic"/>
+              </a:rPr>
+              <a:t>📑 차례</a:t>
+            </a:r>
+          </a:p>
+        </p:txBody>
+      </p:sp>
+      <p:sp>
+        <p:nvSpPr>
+          <p:cNvPr id="7" name="TextBox 6"/>
+          <p:cNvSpPr txBox="1"/>
+          <p:nvPr/>
+        </p:nvSpPr>
+        <p:spPr>
+          <a:xfrm>
+            <a:off x="365760" y="1417320"/>
+            <a:ext cx="5500116" cy="5212080"/>
+          </a:xfrm>
+          <a:prstGeom prst="rect">
+            <a:avLst/>
+          </a:prstGeom>
+          <a:noFill/>
+        </p:spPr>
+        <p:txBody>
+          <a:bodyPr wrap="none">
+            <a:spAutoFit/>
+          </a:bodyPr>
+          <a:lstStyle/>
+          <a:p>
+            <a:pPr>
+              <a:spcAft>
+                <a:spcPts val="1080"/>
+              </a:spcAft>
+            </a:pPr>
+            <a:r>
+              <a:rPr sz="1100" b="1">
+                <a:solidFill>
+                  <a:srgbClr val="4F46E5"/>
+                </a:solidFill>
+                <a:latin typeface="Malgun Gothic"/>
+              </a:rPr>
+              <a:t>·   </a:t>
+            </a:r>
+            <a:r>
+              <a:rPr sz="1100">
+                <a:solidFill>
+                  <a:srgbClr val="334155"/>
+                </a:solidFill>
+                <a:latin typeface="Malgun Gothic"/>
+              </a:rPr>
+              <a:t>소개</a:t>
+            </a:r>
+            <a:r>
+              <a:rPr sz="950">
+                <a:solidFill>
+                  <a:srgbClr val="94A3B8"/>
+                </a:solidFill>
+                <a:latin typeface="Malgun Gothic"/>
+              </a:rPr>
+              <a:t>   ·  p.3</a:t>
+            </a:r>
+          </a:p>
+          <a:p>
+            <a:pPr>
+              <a:spcAft>
+                <a:spcPts val="1080"/>
+              </a:spcAft>
+            </a:pPr>
+            <a:r>
+              <a:rPr sz="1100" b="1">
+                <a:solidFill>
+                  <a:srgbClr val="4F46E5"/>
+                </a:solidFill>
+                <a:latin typeface="Malgun Gothic"/>
+              </a:rPr>
+              <a:t>01  </a:t>
+            </a:r>
+            <a:r>
+              <a:rPr sz="1100">
+                <a:solidFill>
+                  <a:srgbClr val="334155"/>
+                </a:solidFill>
+                <a:latin typeface="Malgun Gothic"/>
+              </a:rPr>
+              <a:t>🔐 관리자 로그인 &amp; 권한</a:t>
+            </a:r>
+            <a:r>
+              <a:rPr sz="950">
+                <a:solidFill>
+                  <a:srgbClr val="94A3B8"/>
+                </a:solidFill>
+                <a:latin typeface="Malgun Gothic"/>
+              </a:rPr>
+              <a:t>   ·  p.4</a:t>
+            </a:r>
+          </a:p>
+          <a:p>
+            <a:pPr>
+              <a:spcAft>
+                <a:spcPts val="1080"/>
+              </a:spcAft>
+            </a:pPr>
+            <a:r>
+              <a:rPr sz="1100" b="1">
+                <a:solidFill>
+                  <a:srgbClr val="4F46E5"/>
+                </a:solidFill>
+                <a:latin typeface="Malgun Gothic"/>
+              </a:rPr>
+              <a:t>02  </a:t>
+            </a:r>
+            <a:r>
+              <a:rPr sz="1100">
+                <a:solidFill>
+                  <a:srgbClr val="334155"/>
+                </a:solidFill>
+                <a:latin typeface="Malgun Gothic"/>
+              </a:rPr>
+              <a:t>🏠 대시보드 &amp; 기능 검색</a:t>
+            </a:r>
+            <a:r>
+              <a:rPr sz="950">
+                <a:solidFill>
+                  <a:srgbClr val="94A3B8"/>
+                </a:solidFill>
+                <a:latin typeface="Malgun Gothic"/>
+              </a:rPr>
+              <a:t>   ·  p.5</a:t>
+            </a:r>
+          </a:p>
+          <a:p>
+            <a:pPr>
+              <a:spcAft>
+                <a:spcPts val="1080"/>
+              </a:spcAft>
+            </a:pPr>
+            <a:r>
+              <a:rPr sz="1100" b="1">
+                <a:solidFill>
+                  <a:srgbClr val="4F46E5"/>
+                </a:solidFill>
+                <a:latin typeface="Malgun Gothic"/>
+              </a:rPr>
+              <a:t>03  </a:t>
+            </a:r>
+            <a:r>
+              <a:rPr sz="1100">
+                <a:solidFill>
+                  <a:srgbClr val="334155"/>
+                </a:solidFill>
+                <a:latin typeface="Malgun Gothic"/>
+              </a:rPr>
+              <a:t>🤖 AI 운영비서</a:t>
+            </a:r>
+            <a:r>
+              <a:rPr sz="950">
+                <a:solidFill>
+                  <a:srgbClr val="94A3B8"/>
+                </a:solidFill>
+                <a:latin typeface="Malgun Gothic"/>
+              </a:rPr>
+              <a:t>   ·  p.6</a:t>
+            </a:r>
+          </a:p>
+          <a:p>
+            <a:pPr>
+              <a:spcAft>
+                <a:spcPts val="1080"/>
+              </a:spcAft>
+            </a:pPr>
+            <a:r>
+              <a:rPr sz="1100" b="1">
+                <a:solidFill>
+                  <a:srgbClr val="4F46E5"/>
+                </a:solidFill>
+                <a:latin typeface="Malgun Gothic"/>
+              </a:rPr>
+              <a:t>04  </a:t>
+            </a:r>
+            <a:r>
+              <a:rPr sz="1100">
+                <a:solidFill>
+                  <a:srgbClr val="334155"/>
+                </a:solidFill>
+                <a:latin typeface="Malgun Gothic"/>
+              </a:rPr>
+              <a:t>🎥 화상수업 입장 구조 이해</a:t>
+            </a:r>
+            <a:r>
+              <a:rPr sz="950">
+                <a:solidFill>
+                  <a:srgbClr val="94A3B8"/>
+                </a:solidFill>
+                <a:latin typeface="Malgun Gothic"/>
+              </a:rPr>
+              <a:t>   ·  p.7</a:t>
+            </a:r>
+          </a:p>
+          <a:p>
+            <a:pPr>
+              <a:spcAft>
+                <a:spcPts val="1080"/>
+              </a:spcAft>
+            </a:pPr>
+            <a:r>
+              <a:rPr sz="1100" b="1">
+                <a:solidFill>
+                  <a:srgbClr val="4F46E5"/>
+                </a:solidFill>
+                <a:latin typeface="Malgun Gothic"/>
+              </a:rPr>
+              <a:t>05  </a:t>
+            </a:r>
+            <a:r>
+              <a:rPr sz="1100">
+                <a:solidFill>
+                  <a:srgbClr val="334155"/>
+                </a:solidFill>
+                <a:latin typeface="Malgun Gothic"/>
+              </a:rPr>
+              <a:t>🖥️ 교실 화면 구조 이해</a:t>
+            </a:r>
+            <a:r>
+              <a:rPr sz="950">
+                <a:solidFill>
+                  <a:srgbClr val="94A3B8"/>
+                </a:solidFill>
+                <a:latin typeface="Malgun Gothic"/>
+              </a:rPr>
+              <a:t>   ·  p.8</a:t>
+            </a:r>
+          </a:p>
+          <a:p>
+            <a:pPr>
+              <a:spcAft>
+                <a:spcPts val="1080"/>
+              </a:spcAft>
+            </a:pPr>
+            <a:r>
+              <a:rPr sz="1100" b="1">
+                <a:solidFill>
+                  <a:srgbClr val="4F46E5"/>
+                </a:solidFill>
+                <a:latin typeface="Malgun Gothic"/>
+              </a:rPr>
+              <a:t>06  </a:t>
+            </a:r>
+            <a:r>
+              <a:rPr sz="1100">
+                <a:solidFill>
+                  <a:srgbClr val="334155"/>
+                </a:solidFill>
+                <a:latin typeface="Malgun Gothic"/>
+              </a:rPr>
+              <a:t>🧰 교실 도구 이해 (지원용)</a:t>
+            </a:r>
+            <a:r>
+              <a:rPr sz="950">
+                <a:solidFill>
+                  <a:srgbClr val="94A3B8"/>
+                </a:solidFill>
+                <a:latin typeface="Malgun Gothic"/>
+              </a:rPr>
+              <a:t>   ·  p.9</a:t>
+            </a:r>
+          </a:p>
+          <a:p>
+            <a:pPr>
+              <a:spcAft>
+                <a:spcPts val="1080"/>
+              </a:spcAft>
+            </a:pPr>
+            <a:r>
+              <a:rPr sz="1100" b="1">
+                <a:solidFill>
+                  <a:srgbClr val="4F46E5"/>
+                </a:solidFill>
+                <a:latin typeface="Malgun Gothic"/>
+              </a:rPr>
+              <a:t>07  </a:t>
+            </a:r>
+            <a:r>
+              <a:rPr sz="1100">
+                <a:solidFill>
+                  <a:srgbClr val="334155"/>
+                </a:solidFill>
+                <a:latin typeface="Malgun Gothic"/>
+              </a:rPr>
+              <a:t>🌟 수업 중 칭찬 포인트 (지급·누적)</a:t>
+            </a:r>
+            <a:r>
+              <a:rPr sz="950">
+                <a:solidFill>
+                  <a:srgbClr val="94A3B8"/>
+                </a:solidFill>
+                <a:latin typeface="Malgun Gothic"/>
+              </a:rPr>
+              <a:t>   ·  p.10</a:t>
+            </a:r>
+          </a:p>
+          <a:p>
+            <a:pPr>
+              <a:spcAft>
+                <a:spcPts val="1080"/>
+              </a:spcAft>
+            </a:pPr>
+            <a:r>
+              <a:rPr sz="1100" b="1">
+                <a:solidFill>
+                  <a:srgbClr val="4F46E5"/>
+                </a:solidFill>
+                <a:latin typeface="Malgun Gothic"/>
+              </a:rPr>
+              <a:t>08  </a:t>
+            </a:r>
+            <a:r>
+              <a:rPr sz="1100">
+                <a:solidFill>
+                  <a:srgbClr val="334155"/>
+                </a:solidFill>
+                <a:latin typeface="Malgun Gothic"/>
+              </a:rPr>
+              <a:t>👩‍🏫 강사 통합 관리</a:t>
+            </a:r>
+            <a:r>
+              <a:rPr sz="950">
+                <a:solidFill>
+                  <a:srgbClr val="94A3B8"/>
+                </a:solidFill>
+                <a:latin typeface="Malgun Gothic"/>
+              </a:rPr>
+              <a:t>   ·  p.11</a:t>
+            </a:r>
+          </a:p>
+          <a:p>
+            <a:pPr>
+              <a:spcAft>
+                <a:spcPts val="1080"/>
+              </a:spcAft>
+            </a:pPr>
+            <a:r>
+              <a:rPr sz="1100" b="1">
+                <a:solidFill>
+                  <a:srgbClr val="4F46E5"/>
+                </a:solidFill>
+                <a:latin typeface="Malgun Gothic"/>
+              </a:rPr>
+              <a:t>09  </a:t>
+            </a:r>
+            <a:r>
+              <a:rPr sz="1100">
+                <a:solidFill>
+                  <a:srgbClr val="334155"/>
+                </a:solidFill>
+                <a:latin typeface="Malgun Gothic"/>
+              </a:rPr>
+              <a:t>💳 회계 · 포인트 관리</a:t>
+            </a:r>
+            <a:r>
+              <a:rPr sz="950">
+                <a:solidFill>
+                  <a:srgbClr val="94A3B8"/>
+                </a:solidFill>
+                <a:latin typeface="Malgun Gothic"/>
+              </a:rPr>
+              <a:t>   ·  p.12</a:t>
+            </a:r>
+          </a:p>
+          <a:p>
+            <a:pPr>
+              <a:spcAft>
+                <a:spcPts val="1080"/>
+              </a:spcAft>
+            </a:pPr>
+            <a:r>
+              <a:rPr sz="1100" b="1">
+                <a:solidFill>
+                  <a:srgbClr val="4F46E5"/>
+                </a:solidFill>
+                <a:latin typeface="Malgun Gothic"/>
+              </a:rPr>
+              <a:t>10  </a:t>
+            </a:r>
+            <a:r>
+              <a:rPr sz="1100">
+                <a:solidFill>
+                  <a:srgbClr val="334155"/>
+                </a:solidFill>
+                <a:latin typeface="Malgun Gothic"/>
+              </a:rPr>
+              <a:t>🎁 포인트·리워드 정책 관리</a:t>
+            </a:r>
+            <a:r>
+              <a:rPr sz="950">
+                <a:solidFill>
+                  <a:srgbClr val="94A3B8"/>
+                </a:solidFill>
+                <a:latin typeface="Malgun Gothic"/>
+              </a:rPr>
+              <a:t>   ·  p.13</a:t>
+            </a:r>
+          </a:p>
+          <a:p>
+            <a:pPr>
+              <a:spcAft>
+                <a:spcPts val="1080"/>
+              </a:spcAft>
+            </a:pPr>
+            <a:r>
+              <a:rPr sz="1100" b="1">
+                <a:solidFill>
+                  <a:srgbClr val="4F46E5"/>
+                </a:solidFill>
+                <a:latin typeface="Malgun Gothic"/>
+              </a:rPr>
+              <a:t>11  </a:t>
+            </a:r>
+            <a:r>
+              <a:rPr sz="1100">
+                <a:solidFill>
+                  <a:srgbClr val="334155"/>
+                </a:solidFill>
+                <a:latin typeface="Malgun Gothic"/>
+              </a:rPr>
+              <a:t>↩️ 환불 규정 · 처리</a:t>
+            </a:r>
+            <a:r>
+              <a:rPr sz="950">
+                <a:solidFill>
+                  <a:srgbClr val="94A3B8"/>
+                </a:solidFill>
+                <a:latin typeface="Malgun Gothic"/>
+              </a:rPr>
+              <a:t>   ·  p.14</a:t>
+            </a:r>
+          </a:p>
+          <a:p>
+            <a:pPr>
+              <a:spcAft>
+                <a:spcPts val="1080"/>
+              </a:spcAft>
+            </a:pPr>
+            <a:r>
+              <a:rPr sz="1100" b="1">
+                <a:solidFill>
+                  <a:srgbClr val="4F46E5"/>
+                </a:solidFill>
+                <a:latin typeface="Malgun Gothic"/>
+              </a:rPr>
+              <a:t>12  </a:t>
+            </a:r>
+            <a:r>
+              <a:rPr sz="1100">
+                <a:solidFill>
+                  <a:srgbClr val="334155"/>
+                </a:solidFill>
+                <a:latin typeface="Malgun Gothic"/>
+              </a:rPr>
+              <a:t>🧑‍🎓 학생 · 학부모 관리</a:t>
+            </a:r>
+            <a:r>
+              <a:rPr sz="950">
+                <a:solidFill>
+                  <a:srgbClr val="94A3B8"/>
+                </a:solidFill>
+                <a:latin typeface="Malgun Gothic"/>
+              </a:rPr>
+              <a:t>   ·  p.15</a:t>
+            </a:r>
+          </a:p>
+          <a:p>
+            <a:pPr>
+              <a:spcAft>
+                <a:spcPts val="1080"/>
+              </a:spcAft>
+            </a:pPr>
+            <a:r>
+              <a:rPr sz="1100" b="1">
+                <a:solidFill>
+                  <a:srgbClr val="4F46E5"/>
+                </a:solidFill>
+                <a:latin typeface="Malgun Gothic"/>
+              </a:rPr>
+              <a:t>13  </a:t>
+            </a:r>
+            <a:r>
+              <a:rPr sz="1100">
+                <a:solidFill>
+                  <a:srgbClr val="334155"/>
+                </a:solidFill>
+                <a:latin typeface="Malgun Gothic"/>
+              </a:rPr>
+              <a:t>👨‍👩‍👧 학부모 마이페이지</a:t>
+            </a:r>
+            <a:r>
+              <a:rPr sz="950">
+                <a:solidFill>
+                  <a:srgbClr val="94A3B8"/>
+                </a:solidFill>
+                <a:latin typeface="Malgun Gothic"/>
+              </a:rPr>
+              <a:t>   ·  p.16</a:t>
+            </a:r>
+          </a:p>
+          <a:p>
+            <a:pPr>
+              <a:spcAft>
+                <a:spcPts val="1080"/>
+              </a:spcAft>
+            </a:pPr>
+            <a:r>
+              <a:rPr sz="1100" b="1">
+                <a:solidFill>
+                  <a:srgbClr val="4F46E5"/>
+                </a:solidFill>
+                <a:latin typeface="Malgun Gothic"/>
+              </a:rPr>
+              <a:t>14  </a:t>
+            </a:r>
+            <a:r>
+              <a:rPr sz="1100">
+                <a:solidFill>
+                  <a:srgbClr val="334155"/>
+                </a:solidFill>
+                <a:latin typeface="Malgun Gothic"/>
+              </a:rPr>
+              <a:t>📅 수업 예약 관리</a:t>
+            </a:r>
+            <a:r>
+              <a:rPr sz="950">
+                <a:solidFill>
+                  <a:srgbClr val="94A3B8"/>
+                </a:solidFill>
+                <a:latin typeface="Malgun Gothic"/>
+              </a:rPr>
+              <a:t>   ·  p.17</a:t>
+            </a:r>
+          </a:p>
+          <a:p>
+            <a:pPr>
+              <a:spcAft>
+                <a:spcPts val="1080"/>
+              </a:spcAft>
+            </a:pPr>
+            <a:r>
+              <a:rPr sz="1100" b="1">
+                <a:solidFill>
+                  <a:srgbClr val="4F46E5"/>
+                </a:solidFill>
+                <a:latin typeface="Malgun Gothic"/>
+              </a:rPr>
+              <a:t>15  </a:t>
+            </a:r>
+            <a:r>
+              <a:rPr sz="1100">
+                <a:solidFill>
+                  <a:srgbClr val="334155"/>
+                </a:solidFill>
+                <a:latin typeface="Malgun Gothic"/>
+              </a:rPr>
+              <a:t>🔄 수업 연기 관리</a:t>
+            </a:r>
+            <a:r>
+              <a:rPr sz="950">
+                <a:solidFill>
+                  <a:srgbClr val="94A3B8"/>
+                </a:solidFill>
+                <a:latin typeface="Malgun Gothic"/>
+              </a:rPr>
+              <a:t>   ·  p.18</a:t>
+            </a:r>
+          </a:p>
+        </p:txBody>
+      </p:sp>
+      <p:sp>
+        <p:nvSpPr>
+          <p:cNvPr id="8" name="TextBox 7"/>
+          <p:cNvSpPr txBox="1"/>
+          <p:nvPr/>
+        </p:nvSpPr>
+        <p:spPr>
+          <a:xfrm>
+            <a:off x="6094476" y="1417320"/>
+            <a:ext cx="5500116" cy="5212080"/>
+          </a:xfrm>
+          <a:prstGeom prst="rect">
+            <a:avLst/>
+          </a:prstGeom>
+          <a:noFill/>
+        </p:spPr>
+        <p:txBody>
+          <a:bodyPr wrap="none">
+            <a:spAutoFit/>
+          </a:bodyPr>
+          <a:lstStyle/>
+          <a:p>
+            <a:pPr>
+              <a:spcAft>
+                <a:spcPts val="1080"/>
+              </a:spcAft>
+            </a:pPr>
+            <a:r>
+              <a:rPr sz="1100" b="1">
+                <a:solidFill>
+                  <a:srgbClr val="4F46E5"/>
+                </a:solidFill>
+                <a:latin typeface="Malgun Gothic"/>
+              </a:rPr>
+              <a:t>16  </a:t>
+            </a:r>
+            <a:r>
+              <a:rPr sz="1100">
+                <a:solidFill>
+                  <a:srgbClr val="334155"/>
+                </a:solidFill>
+                <a:latin typeface="Malgun Gothic"/>
+              </a:rPr>
+              <a:t>📚 교육 · 커리큘럼 관리</a:t>
+            </a:r>
+            <a:r>
+              <a:rPr sz="950">
+                <a:solidFill>
+                  <a:srgbClr val="94A3B8"/>
+                </a:solidFill>
+                <a:latin typeface="Malgun Gothic"/>
+              </a:rPr>
+              <a:t>   ·  p.19</a:t>
+            </a:r>
+          </a:p>
+          <a:p>
+            <a:pPr>
+              <a:spcAft>
+                <a:spcPts val="1080"/>
+              </a:spcAft>
+            </a:pPr>
+            <a:r>
+              <a:rPr sz="1100" b="1">
+                <a:solidFill>
+                  <a:srgbClr val="4F46E5"/>
+                </a:solidFill>
+                <a:latin typeface="Malgun Gothic"/>
+              </a:rPr>
+              <a:t>17  </a:t>
+            </a:r>
+            <a:r>
+              <a:rPr sz="1100">
+                <a:solidFill>
+                  <a:srgbClr val="334155"/>
+                </a:solidFill>
+                <a:latin typeface="Malgun Gothic"/>
+              </a:rPr>
+              <a:t>🧲 리텐션 센터</a:t>
+            </a:r>
+            <a:r>
+              <a:rPr sz="950">
+                <a:solidFill>
+                  <a:srgbClr val="94A3B8"/>
+                </a:solidFill>
+                <a:latin typeface="Malgun Gothic"/>
+              </a:rPr>
+              <a:t>   ·  p.20</a:t>
+            </a:r>
+          </a:p>
+          <a:p>
+            <a:pPr>
+              <a:spcAft>
+                <a:spcPts val="1080"/>
+              </a:spcAft>
+            </a:pPr>
+            <a:r>
+              <a:rPr sz="1100" b="1">
+                <a:solidFill>
+                  <a:srgbClr val="4F46E5"/>
+                </a:solidFill>
+                <a:latin typeface="Malgun Gothic"/>
+              </a:rPr>
+              <a:t>18  </a:t>
+            </a:r>
+            <a:r>
+              <a:rPr sz="1100">
+                <a:solidFill>
+                  <a:srgbClr val="334155"/>
+                </a:solidFill>
+                <a:latin typeface="Malgun Gothic"/>
+              </a:rPr>
+              <a:t>🌳 조직 정산 · 월간 리포트</a:t>
+            </a:r>
+            <a:r>
+              <a:rPr sz="950">
+                <a:solidFill>
+                  <a:srgbClr val="94A3B8"/>
+                </a:solidFill>
+                <a:latin typeface="Malgun Gothic"/>
+              </a:rPr>
+              <a:t>   ·  p.21</a:t>
+            </a:r>
+          </a:p>
+          <a:p>
+            <a:pPr>
+              <a:spcAft>
+                <a:spcPts val="1080"/>
+              </a:spcAft>
+            </a:pPr>
+            <a:r>
+              <a:rPr sz="1100" b="1">
+                <a:solidFill>
+                  <a:srgbClr val="4F46E5"/>
+                </a:solidFill>
+                <a:latin typeface="Malgun Gothic"/>
+              </a:rPr>
+              <a:t>19  </a:t>
+            </a:r>
+            <a:r>
+              <a:rPr sz="1100">
+                <a:solidFill>
+                  <a:srgbClr val="334155"/>
+                </a:solidFill>
+                <a:latin typeface="Malgun Gothic"/>
+              </a:rPr>
+              <a:t>🎧 고객센터 · FAQ 운영</a:t>
+            </a:r>
+            <a:r>
+              <a:rPr sz="950">
+                <a:solidFill>
+                  <a:srgbClr val="94A3B8"/>
+                </a:solidFill>
+                <a:latin typeface="Malgun Gothic"/>
+              </a:rPr>
+              <a:t>   ·  p.22</a:t>
+            </a:r>
+          </a:p>
+          <a:p>
+            <a:pPr>
+              <a:spcAft>
+                <a:spcPts val="1080"/>
+              </a:spcAft>
+            </a:pPr>
+            <a:r>
+              <a:rPr sz="1100" b="1">
+                <a:solidFill>
+                  <a:srgbClr val="4F46E5"/>
+                </a:solidFill>
+                <a:latin typeface="Malgun Gothic"/>
+              </a:rPr>
+              <a:t>20  </a:t>
+            </a:r>
+            <a:r>
+              <a:rPr sz="1100">
+                <a:solidFill>
+                  <a:srgbClr val="334155"/>
+                </a:solidFill>
+                <a:latin typeface="Malgun Gothic"/>
+              </a:rPr>
+              <a:t>🕐 한국·필리핀 듀얼 시계</a:t>
+            </a:r>
+            <a:r>
+              <a:rPr sz="950">
+                <a:solidFill>
+                  <a:srgbClr val="94A3B8"/>
+                </a:solidFill>
+                <a:latin typeface="Malgun Gothic"/>
+              </a:rPr>
+              <a:t>   ·  p.23</a:t>
+            </a:r>
+          </a:p>
+          <a:p>
+            <a:pPr>
+              <a:spcAft>
+                <a:spcPts val="1080"/>
+              </a:spcAft>
+            </a:pPr>
+            <a:r>
+              <a:rPr sz="1100" b="1">
+                <a:solidFill>
+                  <a:srgbClr val="4F46E5"/>
+                </a:solidFill>
+                <a:latin typeface="Malgun Gothic"/>
+              </a:rPr>
+              <a:t>21  </a:t>
+            </a:r>
+            <a:r>
+              <a:rPr sz="1100">
+                <a:solidFill>
+                  <a:srgbClr val="334155"/>
+                </a:solidFill>
+                <a:latin typeface="Malgun Gothic"/>
+              </a:rPr>
+              <a:t>🇨🇳 중국어 발음 코치</a:t>
+            </a:r>
+            <a:r>
+              <a:rPr sz="950">
+                <a:solidFill>
+                  <a:srgbClr val="94A3B8"/>
+                </a:solidFill>
+                <a:latin typeface="Malgun Gothic"/>
+              </a:rPr>
+              <a:t>   ·  p.24</a:t>
+            </a:r>
+          </a:p>
+          <a:p>
+            <a:pPr>
+              <a:spcAft>
+                <a:spcPts val="1080"/>
+              </a:spcAft>
+            </a:pPr>
+            <a:r>
+              <a:rPr sz="1100" b="1">
+                <a:solidFill>
+                  <a:srgbClr val="4F46E5"/>
+                </a:solidFill>
+                <a:latin typeface="Malgun Gothic"/>
+              </a:rPr>
+              <a:t>22  </a:t>
+            </a:r>
+            <a:r>
+              <a:rPr sz="1100">
+                <a:solidFill>
+                  <a:srgbClr val="334155"/>
+                </a:solidFill>
+                <a:latin typeface="Malgun Gothic"/>
+              </a:rPr>
+              <a:t>📢 공지 스튜디오 (포스터 + 팝업)</a:t>
+            </a:r>
+            <a:r>
+              <a:rPr sz="950">
+                <a:solidFill>
+                  <a:srgbClr val="94A3B8"/>
+                </a:solidFill>
+                <a:latin typeface="Malgun Gothic"/>
+              </a:rPr>
+              <a:t>   ·  p.25</a:t>
+            </a:r>
+          </a:p>
+          <a:p>
+            <a:pPr>
+              <a:spcAft>
+                <a:spcPts val="1080"/>
+              </a:spcAft>
+            </a:pPr>
+            <a:r>
+              <a:rPr sz="1100" b="1">
+                <a:solidFill>
+                  <a:srgbClr val="4F46E5"/>
+                </a:solidFill>
+                <a:latin typeface="Malgun Gothic"/>
+              </a:rPr>
+              <a:t>23  </a:t>
+            </a:r>
+            <a:r>
+              <a:rPr sz="1100">
+                <a:solidFill>
+                  <a:srgbClr val="334155"/>
+                </a:solidFill>
+                <a:latin typeface="Malgun Gothic"/>
+              </a:rPr>
+              <a:t>🤖 AI 운영비서에게 시키기</a:t>
+            </a:r>
+            <a:r>
+              <a:rPr sz="950">
+                <a:solidFill>
+                  <a:srgbClr val="94A3B8"/>
+                </a:solidFill>
+                <a:latin typeface="Malgun Gothic"/>
+              </a:rPr>
+              <a:t>   ·  p.26</a:t>
+            </a:r>
+          </a:p>
+          <a:p>
+            <a:pPr>
+              <a:spcAft>
+                <a:spcPts val="1080"/>
+              </a:spcAft>
+            </a:pPr>
+            <a:r>
+              <a:rPr sz="1100" b="1">
+                <a:solidFill>
+                  <a:srgbClr val="4F46E5"/>
+                </a:solidFill>
+                <a:latin typeface="Malgun Gothic"/>
+              </a:rPr>
+              <a:t>24  </a:t>
+            </a:r>
+            <a:r>
+              <a:rPr sz="1100">
+                <a:solidFill>
+                  <a:srgbClr val="334155"/>
+                </a:solidFill>
+                <a:latin typeface="Malgun Gothic"/>
+              </a:rPr>
+              <a:t>📔 학생 음성 일기 모니터</a:t>
+            </a:r>
+            <a:r>
+              <a:rPr sz="950">
+                <a:solidFill>
+                  <a:srgbClr val="94A3B8"/>
+                </a:solidFill>
+                <a:latin typeface="Malgun Gothic"/>
+              </a:rPr>
+              <a:t>   ·  p.27</a:t>
+            </a:r>
+          </a:p>
+          <a:p>
+            <a:pPr>
+              <a:spcAft>
+                <a:spcPts val="1080"/>
+              </a:spcAft>
+            </a:pPr>
+            <a:r>
+              <a:rPr sz="1100" b="1">
+                <a:solidFill>
+                  <a:srgbClr val="4F46E5"/>
+                </a:solidFill>
+                <a:latin typeface="Malgun Gothic"/>
+              </a:rPr>
+              <a:t>25  </a:t>
+            </a:r>
+            <a:r>
+              <a:rPr sz="1100">
+                <a:solidFill>
+                  <a:srgbClr val="334155"/>
+                </a:solidFill>
+                <a:latin typeface="Malgun Gothic"/>
+              </a:rPr>
+              <a:t>🤖 강사 AI 코칭 검수(운영)</a:t>
+            </a:r>
+            <a:r>
+              <a:rPr sz="950">
+                <a:solidFill>
+                  <a:srgbClr val="94A3B8"/>
+                </a:solidFill>
+                <a:latin typeface="Malgun Gothic"/>
+              </a:rPr>
+              <a:t>   ·  p.28</a:t>
+            </a:r>
+          </a:p>
+          <a:p>
+            <a:pPr>
+              <a:spcAft>
+                <a:spcPts val="1080"/>
+              </a:spcAft>
+            </a:pPr>
+            <a:r>
+              <a:rPr sz="1100" b="1">
+                <a:solidFill>
+                  <a:srgbClr val="4F46E5"/>
+                </a:solidFill>
+                <a:latin typeface="Malgun Gothic"/>
+              </a:rPr>
+              <a:t>26  </a:t>
+            </a:r>
+            <a:r>
+              <a:rPr sz="1100">
+                <a:solidFill>
+                  <a:srgbClr val="334155"/>
+                </a:solidFill>
+                <a:latin typeface="Malgun Gothic"/>
+              </a:rPr>
+              <a:t>관리자 기능 카테고리</a:t>
+            </a:r>
+            <a:r>
+              <a:rPr sz="950">
+                <a:solidFill>
+                  <a:srgbClr val="94A3B8"/>
+                </a:solidFill>
+                <a:latin typeface="Malgun Gothic"/>
+              </a:rPr>
+              <a:t>   ·  p.29</a:t>
+            </a:r>
+          </a:p>
+          <a:p>
+            <a:pPr>
+              <a:spcAft>
+                <a:spcPts val="1080"/>
+              </a:spcAft>
+            </a:pPr>
+            <a:r>
+              <a:rPr sz="1100" b="1">
+                <a:solidFill>
+                  <a:srgbClr val="4F46E5"/>
+                </a:solidFill>
+                <a:latin typeface="Malgun Gothic"/>
+              </a:rPr>
+              <a:t>27  </a:t>
+            </a:r>
+            <a:r>
+              <a:rPr sz="1100">
+                <a:solidFill>
+                  <a:srgbClr val="334155"/>
+                </a:solidFill>
+                <a:latin typeface="Malgun Gothic"/>
+              </a:rPr>
+              <a:t>한눈에 보는 데이터</a:t>
+            </a:r>
+            <a:r>
+              <a:rPr sz="950">
+                <a:solidFill>
+                  <a:srgbClr val="94A3B8"/>
+                </a:solidFill>
+                <a:latin typeface="Malgun Gothic"/>
+              </a:rPr>
+              <a:t>   ·  p.30</a:t>
+            </a:r>
+          </a:p>
+          <a:p>
+            <a:pPr>
+              <a:spcAft>
+                <a:spcPts val="1080"/>
+              </a:spcAft>
+            </a:pPr>
+            <a:r>
+              <a:rPr sz="1100" b="1">
+                <a:solidFill>
+                  <a:srgbClr val="4F46E5"/>
+                </a:solidFill>
+                <a:latin typeface="Malgun Gothic"/>
+              </a:rPr>
+              <a:t>28  </a:t>
+            </a:r>
+            <a:r>
+              <a:rPr sz="1100">
+                <a:solidFill>
+                  <a:srgbClr val="334155"/>
+                </a:solidFill>
+                <a:latin typeface="Malgun Gothic"/>
+              </a:rPr>
+              <a:t>자주 묻는 질문 (FAQ)</a:t>
+            </a:r>
+            <a:r>
+              <a:rPr sz="950">
+                <a:solidFill>
+                  <a:srgbClr val="94A3B8"/>
+                </a:solidFill>
+                <a:latin typeface="Malgun Gothic"/>
+              </a:rPr>
+              <a:t>   ·  p.31</a:t>
+            </a:r>
+          </a:p>
+          <a:p>
+            <a:pPr>
+              <a:spcAft>
+                <a:spcPts val="1080"/>
+              </a:spcAft>
+            </a:pPr>
+            <a:r>
+              <a:rPr sz="1100" b="1">
+                <a:solidFill>
+                  <a:srgbClr val="4F46E5"/>
+                </a:solidFill>
+                <a:latin typeface="Malgun Gothic"/>
+              </a:rPr>
+              <a:t>29  </a:t>
+            </a:r>
+            <a:r>
+              <a:rPr sz="1100">
+                <a:solidFill>
+                  <a:srgbClr val="334155"/>
+                </a:solidFill>
+                <a:latin typeface="Malgun Gothic"/>
+              </a:rPr>
+              <a:t>매일 운영 체크리스트</a:t>
+            </a:r>
+            <a:r>
+              <a:rPr sz="950">
+                <a:solidFill>
+                  <a:srgbClr val="94A3B8"/>
+                </a:solidFill>
+                <a:latin typeface="Malgun Gothic"/>
+              </a:rPr>
+              <a:t>   ·  p.32</a:t>
+            </a:r>
+          </a:p>
+          <a:p>
+            <a:pPr>
+              <a:spcAft>
+                <a:spcPts val="1080"/>
+              </a:spcAft>
+            </a:pPr>
+            <a:r>
+              <a:rPr sz="1100" b="1">
+                <a:solidFill>
+                  <a:srgbClr val="4F46E5"/>
+                </a:solidFill>
+                <a:latin typeface="Malgun Gothic"/>
+              </a:rPr>
+              <a:t>30  </a:t>
+            </a:r>
+            <a:r>
+              <a:rPr sz="1100">
+                <a:solidFill>
+                  <a:srgbClr val="334155"/>
+                </a:solidFill>
+                <a:latin typeface="Malgun Gothic"/>
+              </a:rPr>
+              <a:t>마무리 · 안정적인 학원 운영을 위한 실천 가이드</a:t>
+            </a:r>
+            <a:r>
+              <a:rPr sz="950">
+                <a:solidFill>
+                  <a:srgbClr val="94A3B8"/>
+                </a:solidFill>
+                <a:latin typeface="Malgun Gothic"/>
+              </a:rPr>
+              <a:t>   ·  p.33</a:t>
             </a:r>
           </a:p>
         </p:txBody>
